--- a/slides/What to use when - Copilot and Cowork (Technical - lite).pptx
+++ b/slides/What to use when - Copilot and Cowork (Technical - lite).pptx
@@ -11889,7 +11889,7 @@
           <a:noFill/>
         </p:spPr>
         <p:txBody>
-          <a:bodyPr wrap="none" lIns="73152" rIns="73152" tIns="36576">
+          <a:bodyPr wrap="square" lIns="73152" rIns="73152" tIns="36576">
             <a:spAutoFit/>
           </a:bodyPr>
           <a:lstStyle/>
@@ -11898,15 +11898,25 @@
               <a:spcAft>
                 <a:spcPts val="500"/>
               </a:spcAft>
-              <a:defRPr sz="1200">
+            </a:pPr>
+            <a:r>
+              <a:rPr sz="1200">
                 <a:solidFill>
                   <a:srgbClr val="F5F7FF"/>
                 </a:solidFill>
                 <a:latin typeface="Segoe UI"/>
-              </a:defRPr>
-            </a:pPr>
-            <a:r>
-              <a:t>• learn.microsoft.com/microsoft-365/copilot/which-copilot-for-your-organization</a:t>
+              </a:rPr>
+              <a:t>• </a:t>
+            </a:r>
+            <a:r>
+              <a:rPr sz="1200" u="sng">
+                <a:solidFill>
+                  <a:srgbClr val="00B7C3"/>
+                </a:solidFill>
+                <a:latin typeface="Segoe UI"/>
+                <a:hlinkClick r:id="rId2"/>
+              </a:rPr>
+              <a:t>learn.microsoft.com/microsoft-365/copilot/which-copilot-for-your-organization</a:t>
             </a:r>
           </a:p>
           <a:p>
@@ -11914,15 +11924,25 @@
               <a:spcAft>
                 <a:spcPts val="500"/>
               </a:spcAft>
-              <a:defRPr sz="1200">
+            </a:pPr>
+            <a:r>
+              <a:rPr sz="1200">
                 <a:solidFill>
                   <a:srgbClr val="F5F7FF"/>
                 </a:solidFill>
                 <a:latin typeface="Segoe UI"/>
-              </a:defRPr>
-            </a:pPr>
-            <a:r>
-              <a:t>• learn.microsoft.com/microsoft-365/copilot/cowork</a:t>
+              </a:rPr>
+              <a:t>• </a:t>
+            </a:r>
+            <a:r>
+              <a:rPr sz="1200" u="sng">
+                <a:solidFill>
+                  <a:srgbClr val="00B7C3"/>
+                </a:solidFill>
+                <a:latin typeface="Segoe UI"/>
+                <a:hlinkClick r:id="rId3"/>
+              </a:rPr>
+              <a:t>learn.microsoft.com/microsoft-365/copilot/cowork</a:t>
             </a:r>
           </a:p>
           <a:p>
@@ -11930,15 +11950,25 @@
               <a:spcAft>
                 <a:spcPts val="500"/>
               </a:spcAft>
-              <a:defRPr sz="1200">
+            </a:pPr>
+            <a:r>
+              <a:rPr sz="1200">
                 <a:solidFill>
                   <a:srgbClr val="F5F7FF"/>
                 </a:solidFill>
                 <a:latin typeface="Segoe UI"/>
-              </a:defRPr>
-            </a:pPr>
-            <a:r>
-              <a:t>• learn.microsoft.com/microsoft-365/copilot/cowork/cowork-faq</a:t>
+              </a:rPr>
+              <a:t>• </a:t>
+            </a:r>
+            <a:r>
+              <a:rPr sz="1200" u="sng">
+                <a:solidFill>
+                  <a:srgbClr val="00B7C3"/>
+                </a:solidFill>
+                <a:latin typeface="Segoe UI"/>
+                <a:hlinkClick r:id="rId4"/>
+              </a:rPr>
+              <a:t>learn.microsoft.com/microsoft-365/copilot/cowork/cowork-faq</a:t>
             </a:r>
           </a:p>
           <a:p>
@@ -11946,15 +11976,25 @@
               <a:spcAft>
                 <a:spcPts val="500"/>
               </a:spcAft>
-              <a:defRPr sz="1200">
+            </a:pPr>
+            <a:r>
+              <a:rPr sz="1200">
                 <a:solidFill>
                   <a:srgbClr val="F5F7FF"/>
                 </a:solidFill>
                 <a:latin typeface="Segoe UI"/>
-              </a:defRPr>
-            </a:pPr>
-            <a:r>
-              <a:t>• learn.microsoft.com/microsoft-365/copilot/researcher-agent</a:t>
+              </a:rPr>
+              <a:t>• </a:t>
+            </a:r>
+            <a:r>
+              <a:rPr sz="1200" u="sng">
+                <a:solidFill>
+                  <a:srgbClr val="00B7C3"/>
+                </a:solidFill>
+                <a:latin typeface="Segoe UI"/>
+                <a:hlinkClick r:id="rId5"/>
+              </a:rPr>
+              <a:t>learn.microsoft.com/microsoft-365/copilot/researcher-agent</a:t>
             </a:r>
           </a:p>
           <a:p>
@@ -11962,15 +12002,25 @@
               <a:spcAft>
                 <a:spcPts val="500"/>
               </a:spcAft>
-              <a:defRPr sz="1200">
+            </a:pPr>
+            <a:r>
+              <a:rPr sz="1200">
                 <a:solidFill>
                   <a:srgbClr val="F5F7FF"/>
                 </a:solidFill>
                 <a:latin typeface="Segoe UI"/>
-              </a:defRPr>
-            </a:pPr>
-            <a:r>
-              <a:t>• learn.microsoft.com/copilot/agents</a:t>
+              </a:rPr>
+              <a:t>• </a:t>
+            </a:r>
+            <a:r>
+              <a:rPr sz="1200" u="sng">
+                <a:solidFill>
+                  <a:srgbClr val="00B7C3"/>
+                </a:solidFill>
+                <a:latin typeface="Segoe UI"/>
+                <a:hlinkClick r:id="rId6"/>
+              </a:rPr>
+              <a:t>learn.microsoft.com/copilot/agents</a:t>
             </a:r>
           </a:p>
           <a:p>
@@ -11978,15 +12028,25 @@
               <a:spcAft>
                 <a:spcPts val="500"/>
               </a:spcAft>
-              <a:defRPr sz="1200">
+            </a:pPr>
+            <a:r>
+              <a:rPr sz="1200">
                 <a:solidFill>
                   <a:srgbClr val="F5F7FF"/>
                 </a:solidFill>
                 <a:latin typeface="Segoe UI"/>
-              </a:defRPr>
-            </a:pPr>
-            <a:r>
-              <a:t>• support.microsoft.com/microsoft-365-copilot/schedule-your-most-used-copilot-prompts</a:t>
+              </a:rPr>
+              <a:t>• </a:t>
+            </a:r>
+            <a:r>
+              <a:rPr sz="1200" u="sng">
+                <a:solidFill>
+                  <a:srgbClr val="00B7C3"/>
+                </a:solidFill>
+                <a:latin typeface="Segoe UI"/>
+                <a:hlinkClick r:id="rId7"/>
+              </a:rPr>
+              <a:t>support.microsoft.com/microsoft-365-copilot/schedule-your-most-used-copilot-prompts</a:t>
             </a:r>
           </a:p>
           <a:p>
@@ -11994,15 +12054,25 @@
               <a:spcAft>
                 <a:spcPts val="500"/>
               </a:spcAft>
-              <a:defRPr sz="1200">
+            </a:pPr>
+            <a:r>
+              <a:rPr sz="1200">
                 <a:solidFill>
                   <a:srgbClr val="F5F7FF"/>
                 </a:solidFill>
                 <a:latin typeface="Segoe UI"/>
-              </a:defRPr>
-            </a:pPr>
-            <a:r>
-              <a:t>• adoption.microsoft.com/copilot/cowork/ai-user</a:t>
+              </a:rPr>
+              <a:t>• </a:t>
+            </a:r>
+            <a:r>
+              <a:rPr sz="1200" u="sng">
+                <a:solidFill>
+                  <a:srgbClr val="00B7C3"/>
+                </a:solidFill>
+                <a:latin typeface="Segoe UI"/>
+                <a:hlinkClick r:id="rId8"/>
+              </a:rPr>
+              <a:t>adoption.microsoft.com/copilot/cowork/ai-user</a:t>
             </a:r>
           </a:p>
           <a:p>
@@ -12010,15 +12080,25 @@
               <a:spcAft>
                 <a:spcPts val="500"/>
               </a:spcAft>
-              <a:defRPr sz="1200">
+            </a:pPr>
+            <a:r>
+              <a:rPr sz="1200">
                 <a:solidFill>
                   <a:srgbClr val="F5F7FF"/>
                 </a:solidFill>
                 <a:latin typeface="Segoe UI"/>
-              </a:defRPr>
-            </a:pPr>
-            <a:r>
-              <a:t>• adoption.microsoft.com</a:t>
+              </a:rPr>
+              <a:t>• </a:t>
+            </a:r>
+            <a:r>
+              <a:rPr sz="1200" u="sng">
+                <a:solidFill>
+                  <a:srgbClr val="00B7C3"/>
+                </a:solidFill>
+                <a:latin typeface="Segoe UI"/>
+                <a:hlinkClick r:id="rId9"/>
+              </a:rPr>
+              <a:t>adoption.microsoft.com</a:t>
             </a:r>
           </a:p>
         </p:txBody>

--- a/slides/What to use when - Copilot and Cowork (Technical - lite).pptx
+++ b/slides/What to use when - Copilot and Cowork (Technical - lite).pptx
@@ -3179,7 +3179,7 @@
                 </a:solidFill>
                 <a:latin typeface="Segoe UI"/>
               </a:rPr>
-              <a:t>Microsoft 365 Copilot is your everyday AI assistant. Copilot Cowork is the AI coworker that does the work for you. This guide shows the quickest path for everyday work and when to bring Cowork in. Every claim is grounded in Microsoft Learn or microsoft.com, with links at the bottom.</a:t>
+              <a:t>Microsoft 365 Copilot is your everyday AI assistant. Copilot Cowork is the AI coworker that does the work for you. This guide shows the quickest path for everyday work and when to bring Cowork in. Every claim is grounded in Microsoft Learn or microsoft.com, with links at the bottom. Preview features are labelled and may change.</a:t>
             </a:r>
           </a:p>
         </p:txBody>
@@ -6036,7 +6036,7 @@
                 </a:solidFill>
                 <a:latin typeface="Segoe UI"/>
               </a:rPr>
-              <a:t>You can schedule this to run automatically by starting your prompt with "Create a skill where this occurs every Monday morning."</a:t>
+              <a:t>To automate this, save the prompt, then in Microsoft 365 Copilot hover the saved prompt and choose "Schedule this prompt". Use a skill separately when you want the...</a:t>
             </a:r>
           </a:p>
         </p:txBody>
@@ -8030,7 +8030,7 @@
                 </a:solidFill>
                 <a:latin typeface="Segoe UI"/>
               </a:rPr>
-              <a:t>This task features a scheduled prompt, which tells Cowork you want it to run automatically on a recurring basis. To create a scheduled prompt, simply describe what...</a:t>
+              <a:t>This task can use a scheduled prompt. In Microsoft 365 Copilot, save the prompt, hover it, choose "Schedule this prompt", and set the recurrence.</a:t>
             </a:r>
           </a:p>
         </p:txBody>
@@ -12443,7 +12443,7 @@
               </a:defRPr>
             </a:pPr>
             <a:r>
-              <a:t>• Take real action across M365 (send emails, schedule meetings, post in Teams, organise files)</a:t>
+              <a:t>• Take real action across Microsoft 365 (send emails, schedule meetings, post in Teams, organise files)</a:t>
             </a:r>
           </a:p>
         </p:txBody>
